--- a/Zeroth_Review_SanjayKarthick.pptx
+++ b/Zeroth_Review_SanjayKarthick.pptx
@@ -209,7 +209,7 @@
           <a:p>
             <a:fld id="{E8707909-389B-4C62-81CE-30713EB22CD4}" type="datetimeFigureOut">
               <a:rPr lang="en-IN" smtClean="0"/>
-              <a:t>27-08-2026</a:t>
+              <a:t>28-08-2026</a:t>
             </a:fld>
             <a:endParaRPr lang="en-IN"/>
           </a:p>
@@ -1389,7 +1389,7 @@
               <a:buNone/>
             </a:pPr>
             <a:r>
-              <a:rPr lang="en-US" sz="1600" b="1" kern="0" spc="300">
+              <a:rPr lang="en-US" sz="1600" b="1" kern="0" spc="300" dirty="0">
                 <a:solidFill>
                   <a:srgbClr val="02C39A"/>
                 </a:solidFill>
@@ -1397,7 +1397,7 @@
                 <a:ea typeface="Calibri" pitchFamily="34" charset="-122"/>
                 <a:cs typeface="Calibri" pitchFamily="34" charset="-120"/>
               </a:rPr>
-              <a:t>INDIVIDUAL PROJECT 1</a:t>
+              <a:t>INDIVIDUAL PROJECTS</a:t>
             </a:r>
             <a:endParaRPr lang="en-US" sz="1600" dirty="0"/>
           </a:p>
@@ -1442,7 +1442,7 @@
           <a:bodyPr/>
           <a:lstStyle/>
           <a:p>
-            <a:endParaRPr lang="en-IN"/>
+            <a:endParaRPr lang="en-IN" dirty="0"/>
           </a:p>
         </p:txBody>
       </p:sp>
@@ -1626,6 +1626,69 @@
               <a:t>251011013-Sanjay Karthick S</a:t>
             </a:r>
             <a:endParaRPr lang="en-US" sz="1400" dirty="0"/>
+          </a:p>
+        </p:txBody>
+      </p:sp>
+      <p:sp>
+        <p:nvSpPr>
+          <p:cNvPr id="12" name="Text 9">
+            <a:extLst>
+              <a:ext uri="{FF2B5EF4-FFF2-40B4-BE49-F238E27FC236}">
+                <a16:creationId xmlns:a16="http://schemas.microsoft.com/office/drawing/2014/main" id="{580B73BA-0AA1-4BD8-ECBD-F2B31945E3C5}"/>
+              </a:ext>
+            </a:extLst>
+          </p:cNvPr>
+          <p:cNvSpPr/>
+          <p:nvPr/>
+        </p:nvSpPr>
+        <p:spPr>
+          <a:xfrm>
+            <a:off x="4610100" y="5168854"/>
+            <a:ext cx="2971800" cy="347472"/>
+          </a:xfrm>
+          <a:prstGeom prst="rect">
+            <a:avLst/>
+          </a:prstGeom>
+          <a:noFill/>
+          <a:ln/>
+        </p:spPr>
+        <p:txBody>
+          <a:bodyPr wrap="square" lIns="0" tIns="0" rIns="0" bIns="0" rtlCol="0" anchor="ctr"/>
+          <a:lstStyle/>
+          <a:p>
+            <a:pPr marL="0" indent="0" algn="ctr">
+              <a:buNone/>
+            </a:pPr>
+            <a:r>
+              <a:rPr lang="en-US" sz="1400" dirty="0">
+                <a:solidFill>
+                  <a:srgbClr val="D9F2EE"/>
+                </a:solidFill>
+                <a:latin typeface="Calibri" pitchFamily="34" charset="0"/>
+                <a:ea typeface="Calibri" pitchFamily="34" charset="-122"/>
+                <a:cs typeface="Calibri" pitchFamily="34" charset="-120"/>
+              </a:rPr>
+              <a:t>Rajalakshmi </a:t>
+            </a:r>
+            <a:r>
+              <a:rPr lang="en-US" sz="1400">
+                <a:solidFill>
+                  <a:srgbClr val="D9F2EE"/>
+                </a:solidFill>
+                <a:latin typeface="Calibri" pitchFamily="34" charset="0"/>
+                <a:ea typeface="Calibri" pitchFamily="34" charset="-122"/>
+                <a:cs typeface="Calibri" pitchFamily="34" charset="-120"/>
+              </a:rPr>
+              <a:t>Engineering College</a:t>
+            </a:r>
+            <a:endParaRPr lang="en-US" sz="1400" dirty="0">
+              <a:solidFill>
+                <a:srgbClr val="D9F2EE"/>
+              </a:solidFill>
+              <a:latin typeface="Calibri" pitchFamily="34" charset="0"/>
+              <a:ea typeface="Calibri" pitchFamily="34" charset="-122"/>
+              <a:cs typeface="Calibri" pitchFamily="34" charset="-120"/>
+            </a:endParaRPr>
           </a:p>
         </p:txBody>
       </p:sp>

--- a/Zeroth_Review_SanjayKarthick.pptx
+++ b/Zeroth_Review_SanjayKarthick.pptx
@@ -1584,8 +1584,13 @@
                 <a:ea typeface="Calibri" pitchFamily="34" charset="-122"/>
                 <a:cs typeface="Calibri" pitchFamily="34" charset="-120"/>
               </a:rPr>
-              <a:t>Roll No.</a:t>
-            </a:r>
+              <a:t>Roll No. 251011013</a:t>
+            </a:r>
+          </a:p>
+          <a:p>
+            <a:pPr marL="0" indent="0" algn="ctr">
+              <a:buNone/>
+            </a:pPr>
             <a:endParaRPr lang="en-US" sz="1300" dirty="0"/>
           </a:p>
         </p:txBody>
@@ -1614,17 +1619,6 @@
             <a:pPr marL="0" indent="0" algn="ctr">
               <a:buNone/>
             </a:pPr>
-            <a:r>
-              <a:rPr lang="en-US" sz="1400" dirty="0">
-                <a:solidFill>
-                  <a:srgbClr val="D9F2EE"/>
-                </a:solidFill>
-                <a:latin typeface="Calibri" pitchFamily="34" charset="0"/>
-                <a:ea typeface="Calibri" pitchFamily="34" charset="-122"/>
-                <a:cs typeface="Calibri" pitchFamily="34" charset="-120"/>
-              </a:rPr>
-              <a:t>251011013-Sanjay Karthick S</a:t>
-            </a:r>
             <a:endParaRPr lang="en-US" sz="1400" dirty="0"/>
           </a:p>
         </p:txBody>
@@ -1643,7 +1637,7 @@
         </p:nvSpPr>
         <p:spPr>
           <a:xfrm>
-            <a:off x="4610100" y="5168854"/>
+            <a:off x="4678680" y="4943302"/>
             <a:ext cx="2971800" cy="347472"/>
           </a:xfrm>
           <a:prstGeom prst="rect">
@@ -1668,27 +1662,8 @@
                 <a:ea typeface="Calibri" pitchFamily="34" charset="-122"/>
                 <a:cs typeface="Calibri" pitchFamily="34" charset="-120"/>
               </a:rPr>
-              <a:t>Rajalakshmi </a:t>
-            </a:r>
-            <a:r>
-              <a:rPr lang="en-US" sz="1400">
-                <a:solidFill>
-                  <a:srgbClr val="D9F2EE"/>
-                </a:solidFill>
-                <a:latin typeface="Calibri" pitchFamily="34" charset="0"/>
-                <a:ea typeface="Calibri" pitchFamily="34" charset="-122"/>
-                <a:cs typeface="Calibri" pitchFamily="34" charset="-120"/>
-              </a:rPr>
-              <a:t>Engineering College</a:t>
-            </a:r>
-            <a:endParaRPr lang="en-US" sz="1400" dirty="0">
-              <a:solidFill>
-                <a:srgbClr val="D9F2EE"/>
-              </a:solidFill>
-              <a:latin typeface="Calibri" pitchFamily="34" charset="0"/>
-              <a:ea typeface="Calibri" pitchFamily="34" charset="-122"/>
-              <a:cs typeface="Calibri" pitchFamily="34" charset="-120"/>
-            </a:endParaRPr>
+              <a:t>Rajalakshmi Engineering College</a:t>
+            </a:r>
           </a:p>
         </p:txBody>
       </p:sp>
